--- a/Presentation/Independent Asset Valuation Study.pptx
+++ b/Presentation/Independent Asset Valuation Study.pptx
@@ -9859,7 +9859,7 @@
                   <a:latin typeface="Arial" panose="020B0604020202020204" pitchFamily="34" charset="0"/>
                   <a:cs typeface="Arial" panose="020B0604020202020204" pitchFamily="34" charset="0"/>
                 </a:rPr>
-                <a:t>$3.15Bn</a:t>
+                <a:t>$3.1Bn</a:t>
               </a:r>
               <a:r>
                 <a:rPr lang="en-US" sz="2800" dirty="0">
@@ -12244,7 +12244,7 @@
                 <a:latin typeface="Arial" panose="020B0604020202020204" pitchFamily="34" charset="0"/>
                 <a:cs typeface="Arial" panose="020B0604020202020204" pitchFamily="34" charset="0"/>
               </a:rPr>
-              <a:t>End Notes</a:t>
+              <a:t>Key Takeaways</a:t>
             </a:r>
           </a:p>
         </p:txBody>

--- a/Presentation/Independent Asset Valuation Study.pptx
+++ b/Presentation/Independent Asset Valuation Study.pptx
@@ -2347,7 +2347,7 @@
               <a:latin typeface="Arial" panose="020B0604020202020204" pitchFamily="34" charset="0"/>
               <a:cs typeface="Arial" panose="020B0604020202020204" pitchFamily="34" charset="0"/>
             </a:rPr>
-            <a:t>PV-10 $3.1Bn</a:t>
+            <a:t>PV-10 $3.15Bn</a:t>
           </a:r>
           <a:r>
             <a:rPr lang="en-US" sz="1600" baseline="30000" dirty="0">
@@ -3467,7 +3467,7 @@
               <a:latin typeface="Arial" panose="020B0604020202020204" pitchFamily="34" charset="0"/>
               <a:cs typeface="Arial" panose="020B0604020202020204" pitchFamily="34" charset="0"/>
             </a:rPr>
-            <a:t>PV-10 $3.1Bn</a:t>
+            <a:t>PV-10 $3.15Bn</a:t>
           </a:r>
           <a:r>
             <a:rPr lang="en-US" sz="1600" kern="1200" baseline="30000" dirty="0">
@@ -6191,7 +6191,7 @@
           <a:p>
             <a:fld id="{EAF676CB-1D46-3B42-8B05-BCBADD1BDC68}" type="datetimeFigureOut">
               <a:rPr lang="en-US" smtClean="0"/>
-              <a:t>7/16/26</a:t>
+              <a:t>7/17/26</a:t>
             </a:fld>
             <a:endParaRPr lang="en-US"/>
           </a:p>
@@ -6605,7 +6605,7 @@
           <a:p>
             <a:fld id="{6CC06C82-133A-E74A-8F7A-AF8B764C1ED8}" type="datetimeFigureOut">
               <a:rPr lang="en-US" smtClean="0"/>
-              <a:t>7/16/26</a:t>
+              <a:t>7/17/26</a:t>
             </a:fld>
             <a:endParaRPr lang="en-US"/>
           </a:p>
@@ -6803,7 +6803,7 @@
           <a:p>
             <a:fld id="{6CC06C82-133A-E74A-8F7A-AF8B764C1ED8}" type="datetimeFigureOut">
               <a:rPr lang="en-US" smtClean="0"/>
-              <a:t>7/16/26</a:t>
+              <a:t>7/17/26</a:t>
             </a:fld>
             <a:endParaRPr lang="en-US"/>
           </a:p>
@@ -7011,7 +7011,7 @@
           <a:p>
             <a:fld id="{6CC06C82-133A-E74A-8F7A-AF8B764C1ED8}" type="datetimeFigureOut">
               <a:rPr lang="en-US" smtClean="0"/>
-              <a:t>7/16/26</a:t>
+              <a:t>7/17/26</a:t>
             </a:fld>
             <a:endParaRPr lang="en-US"/>
           </a:p>
@@ -7209,7 +7209,7 @@
           <a:p>
             <a:fld id="{6CC06C82-133A-E74A-8F7A-AF8B764C1ED8}" type="datetimeFigureOut">
               <a:rPr lang="en-US" smtClean="0"/>
-              <a:t>7/16/26</a:t>
+              <a:t>7/17/26</a:t>
             </a:fld>
             <a:endParaRPr lang="en-US"/>
           </a:p>
@@ -7484,7 +7484,7 @@
           <a:p>
             <a:fld id="{6CC06C82-133A-E74A-8F7A-AF8B764C1ED8}" type="datetimeFigureOut">
               <a:rPr lang="en-US" smtClean="0"/>
-              <a:t>7/16/26</a:t>
+              <a:t>7/17/26</a:t>
             </a:fld>
             <a:endParaRPr lang="en-US"/>
           </a:p>
@@ -7749,7 +7749,7 @@
           <a:p>
             <a:fld id="{6CC06C82-133A-E74A-8F7A-AF8B764C1ED8}" type="datetimeFigureOut">
               <a:rPr lang="en-US" smtClean="0"/>
-              <a:t>7/16/26</a:t>
+              <a:t>7/17/26</a:t>
             </a:fld>
             <a:endParaRPr lang="en-US"/>
           </a:p>
@@ -8161,7 +8161,7 @@
           <a:p>
             <a:fld id="{6CC06C82-133A-E74A-8F7A-AF8B764C1ED8}" type="datetimeFigureOut">
               <a:rPr lang="en-US" smtClean="0"/>
-              <a:t>7/16/26</a:t>
+              <a:t>7/17/26</a:t>
             </a:fld>
             <a:endParaRPr lang="en-US"/>
           </a:p>
@@ -8302,7 +8302,7 @@
           <a:p>
             <a:fld id="{6CC06C82-133A-E74A-8F7A-AF8B764C1ED8}" type="datetimeFigureOut">
               <a:rPr lang="en-US" smtClean="0"/>
-              <a:t>7/16/26</a:t>
+              <a:t>7/17/26</a:t>
             </a:fld>
             <a:endParaRPr lang="en-US"/>
           </a:p>
@@ -8415,7 +8415,7 @@
           <a:p>
             <a:fld id="{6CC06C82-133A-E74A-8F7A-AF8B764C1ED8}" type="datetimeFigureOut">
               <a:rPr lang="en-US" smtClean="0"/>
-              <a:t>7/16/26</a:t>
+              <a:t>7/17/26</a:t>
             </a:fld>
             <a:endParaRPr lang="en-US"/>
           </a:p>
@@ -8726,7 +8726,7 @@
           <a:p>
             <a:fld id="{6CC06C82-133A-E74A-8F7A-AF8B764C1ED8}" type="datetimeFigureOut">
               <a:rPr lang="en-US" smtClean="0"/>
-              <a:t>7/16/26</a:t>
+              <a:t>7/17/26</a:t>
             </a:fld>
             <a:endParaRPr lang="en-US"/>
           </a:p>
@@ -9014,7 +9014,7 @@
           <a:p>
             <a:fld id="{6CC06C82-133A-E74A-8F7A-AF8B764C1ED8}" type="datetimeFigureOut">
               <a:rPr lang="en-US" smtClean="0"/>
-              <a:t>7/16/26</a:t>
+              <a:t>7/17/26</a:t>
             </a:fld>
             <a:endParaRPr lang="en-US"/>
           </a:p>
@@ -9255,7 +9255,7 @@
           <a:p>
             <a:fld id="{6CC06C82-133A-E74A-8F7A-AF8B764C1ED8}" type="datetimeFigureOut">
               <a:rPr lang="en-US" smtClean="0"/>
-              <a:t>7/16/26</a:t>
+              <a:t>7/17/26</a:t>
             </a:fld>
             <a:endParaRPr lang="en-US"/>
           </a:p>
@@ -9859,7 +9859,7 @@
                   <a:latin typeface="Arial" panose="020B0604020202020204" pitchFamily="34" charset="0"/>
                   <a:cs typeface="Arial" panose="020B0604020202020204" pitchFamily="34" charset="0"/>
                 </a:rPr>
-                <a:t>$3.1Bn</a:t>
+                <a:t>~$3.15Bn</a:t>
               </a:r>
               <a:r>
                 <a:rPr lang="en-US" sz="2800" dirty="0">
@@ -11960,7 +11960,7 @@
             <p:ph idx="1"/>
             <p:extLst>
               <p:ext uri="{D42A27DB-BD31-4B8C-83A1-F6EECF244321}">
-                <p14:modId xmlns:p14="http://schemas.microsoft.com/office/powerpoint/2010/main" val="2478364045"/>
+                <p14:modId xmlns:p14="http://schemas.microsoft.com/office/powerpoint/2010/main" val="339984651"/>
               </p:ext>
             </p:extLst>
           </p:nvPr>
@@ -12079,7 +12079,7 @@
                 <a:latin typeface="Arial" panose="020B0604020202020204" pitchFamily="34" charset="0"/>
                 <a:cs typeface="Arial" panose="020B0604020202020204" pitchFamily="34" charset="0"/>
               </a:rPr>
-              <a:t>Independent PV-10 of $3.1B</a:t>
+              <a:t>Independent PV-10 of $3.15Bn</a:t>
             </a:r>
             <a:r>
               <a:rPr lang="en-US" b="1" baseline="30000" dirty="0">
@@ -12093,7 +12093,7 @@
                 <a:latin typeface="Arial" panose="020B0604020202020204" pitchFamily="34" charset="0"/>
                 <a:cs typeface="Arial" panose="020B0604020202020204" pitchFamily="34" charset="0"/>
               </a:rPr>
-              <a:t> lands within ~1% of the $3.1B Crescent paid, and reconciles to street EBITDA within 0.1%, indicating the assets were priced fairly.</a:t>
+              <a:t> lands within ~1% of the $3.1Bn Crescent paid, and reconciles to street EBITDA within 0.1%, indicating the assets were priced fairly.</a:t>
             </a:r>
           </a:p>
         </p:txBody>
@@ -12284,7 +12284,7 @@
             </a:pPr>
             <a:r>
               <a:rPr lang="en-US" sz="1800" dirty="0"/>
-              <a:t>My independent valuation puts Vital Energy’s assets at a PV-10 of $3.1B</a:t>
+              <a:t>My independent valuation puts Vital Energy’s assets at a PV-10 of $3.15Bn</a:t>
             </a:r>
             <a:r>
               <a:rPr lang="en-US" sz="1800" baseline="30000" dirty="0">
@@ -12295,7 +12295,7 @@
             </a:r>
             <a:r>
               <a:rPr lang="en-US" sz="1800" dirty="0"/>
-              <a:t> within ~1% of the ~$3.1B Crescent paid. The deal was priced fairly on the rocks.</a:t>
+              <a:t> within ~1% of the ~$3.1Bn Crescent paid. The deal was priced fairly on the rocks.</a:t>
             </a:r>
           </a:p>
           <a:p>
@@ -12373,7 +12373,7 @@
                 <a:latin typeface="Arial" panose="020B0604020202020204" pitchFamily="34" charset="0"/>
                 <a:cs typeface="Arial" panose="020B0604020202020204" pitchFamily="34" charset="0"/>
               </a:rPr>
-              <a:t>~$1BN non-core divestiture pipeline to accelerate deleveraging</a:t>
+              <a:t>~$1Bn non-core divestiture pipeline to accelerate deleveraging</a:t>
             </a:r>
             <a:r>
               <a:rPr lang="en-US" sz="1800" baseline="30000" dirty="0">

--- a/Presentation/Independent Asset Valuation Study.pptx
+++ b/Presentation/Independent Asset Valuation Study.pptx
@@ -5,7 +5,7 @@
     <p:sldMasterId id="2147483648" r:id="rId1"/>
   </p:sldMasterIdLst>
   <p:notesMasterIdLst>
-    <p:notesMasterId r:id="rId7"/>
+    <p:notesMasterId r:id="rId8"/>
   </p:notesMasterIdLst>
   <p:sldIdLst>
     <p:sldId id="256" r:id="rId2"/>
@@ -13,6 +13,7 @@
     <p:sldId id="258" r:id="rId4"/>
     <p:sldId id="259" r:id="rId5"/>
     <p:sldId id="260" r:id="rId6"/>
+    <p:sldId id="262" r:id="rId7"/>
   </p:sldIdLst>
   <p:sldSz cx="12192000" cy="6858000"/>
   <p:notesSz cx="6858000" cy="9144000"/>
@@ -2128,7 +2129,7 @@
         <a:lstStyle/>
         <a:p>
           <a:r>
-            <a:rPr lang="en-US" sz="1600" dirty="0">
+            <a:rPr lang="en-US" sz="1400" dirty="0">
               <a:latin typeface="Arial" panose="020B0604020202020204" pitchFamily="34" charset="0"/>
               <a:cs typeface="Arial" panose="020B0604020202020204" pitchFamily="34" charset="0"/>
             </a:rPr>
@@ -2144,7 +2145,7 @@
         <a:bodyPr/>
         <a:lstStyle/>
         <a:p>
-          <a:endParaRPr lang="en-US" sz="1600">
+          <a:endParaRPr lang="en-US" sz="1400">
             <a:latin typeface="Arial" panose="020B0604020202020204" pitchFamily="34" charset="0"/>
             <a:cs typeface="Arial" panose="020B0604020202020204" pitchFamily="34" charset="0"/>
           </a:endParaRPr>
@@ -2158,7 +2159,7 @@
         <a:bodyPr/>
         <a:lstStyle/>
         <a:p>
-          <a:endParaRPr lang="en-US" sz="1600">
+          <a:endParaRPr lang="en-US" sz="1400">
             <a:latin typeface="Arial" panose="020B0604020202020204" pitchFamily="34" charset="0"/>
             <a:cs typeface="Arial" panose="020B0604020202020204" pitchFamily="34" charset="0"/>
           </a:endParaRPr>
@@ -2176,12 +2177,23 @@
             <a:buNone/>
           </a:pPr>
           <a:r>
-            <a:rPr lang="en-US" sz="1600" dirty="0">
+            <a:rPr lang="en-US" sz="1400" dirty="0">
               <a:latin typeface="Arial" panose="020B0604020202020204" pitchFamily="34" charset="0"/>
               <a:cs typeface="Arial" panose="020B0604020202020204" pitchFamily="34" charset="0"/>
             </a:rPr>
             <a:t>EBITDA $25.78/BOE</a:t>
           </a:r>
+          <a:r>
+            <a:rPr lang="en-US" sz="1400" baseline="30000" dirty="0">
+              <a:latin typeface="Arial" panose="020B0604020202020204" pitchFamily="34" charset="0"/>
+              <a:cs typeface="Arial" panose="020B0604020202020204" pitchFamily="34" charset="0"/>
+            </a:rPr>
+            <a:t>(2)</a:t>
+          </a:r>
+          <a:endParaRPr lang="en-US" sz="1400" dirty="0">
+            <a:latin typeface="Arial" panose="020B0604020202020204" pitchFamily="34" charset="0"/>
+            <a:cs typeface="Arial" panose="020B0604020202020204" pitchFamily="34" charset="0"/>
+          </a:endParaRPr>
         </a:p>
       </dgm:t>
     </dgm:pt>
@@ -2192,7 +2204,7 @@
         <a:bodyPr/>
         <a:lstStyle/>
         <a:p>
-          <a:endParaRPr lang="en-US" sz="1600">
+          <a:endParaRPr lang="en-US" sz="1400">
             <a:latin typeface="Arial" panose="020B0604020202020204" pitchFamily="34" charset="0"/>
             <a:cs typeface="Arial" panose="020B0604020202020204" pitchFamily="34" charset="0"/>
           </a:endParaRPr>
@@ -2206,7 +2218,7 @@
         <a:bodyPr/>
         <a:lstStyle/>
         <a:p>
-          <a:endParaRPr lang="en-US" sz="1600">
+          <a:endParaRPr lang="en-US" sz="1400">
             <a:latin typeface="Arial" panose="020B0604020202020204" pitchFamily="34" charset="0"/>
             <a:cs typeface="Arial" panose="020B0604020202020204" pitchFamily="34" charset="0"/>
           </a:endParaRPr>
@@ -2221,21 +2233,21 @@
         <a:lstStyle/>
         <a:p>
           <a:r>
-            <a:rPr lang="en-US" sz="1600" dirty="0">
+            <a:rPr lang="en-US" sz="1400" dirty="0">
               <a:latin typeface="Arial" panose="020B0604020202020204" pitchFamily="34" charset="0"/>
               <a:cs typeface="Arial" panose="020B0604020202020204" pitchFamily="34" charset="0"/>
             </a:rPr>
             <a:t>Revenue $40.37/BOE</a:t>
           </a:r>
           <a:r>
-            <a:rPr lang="en-US" sz="1600" baseline="30000" dirty="0">
+            <a:rPr lang="en-US" sz="1400" baseline="30000" dirty="0">
               <a:latin typeface="Arial" panose="020B0604020202020204" pitchFamily="34" charset="0"/>
               <a:cs typeface="Arial" panose="020B0604020202020204" pitchFamily="34" charset="0"/>
             </a:rPr>
             <a:t>(2)</a:t>
           </a:r>
           <a:r>
-            <a:rPr lang="en-US" sz="1600" dirty="0">
+            <a:rPr lang="en-US" sz="1400" dirty="0">
               <a:latin typeface="Arial" panose="020B0604020202020204" pitchFamily="34" charset="0"/>
               <a:cs typeface="Arial" panose="020B0604020202020204" pitchFamily="34" charset="0"/>
             </a:rPr>
@@ -2251,7 +2263,7 @@
         <a:bodyPr/>
         <a:lstStyle/>
         <a:p>
-          <a:endParaRPr lang="en-US" sz="1600">
+          <a:endParaRPr lang="en-US" sz="1400">
             <a:latin typeface="Arial" panose="020B0604020202020204" pitchFamily="34" charset="0"/>
             <a:cs typeface="Arial" panose="020B0604020202020204" pitchFamily="34" charset="0"/>
           </a:endParaRPr>
@@ -2265,7 +2277,7 @@
         <a:bodyPr/>
         <a:lstStyle/>
         <a:p>
-          <a:endParaRPr lang="en-US" sz="1600">
+          <a:endParaRPr lang="en-US" sz="1400">
             <a:latin typeface="Arial" panose="020B0604020202020204" pitchFamily="34" charset="0"/>
             <a:cs typeface="Arial" panose="020B0604020202020204" pitchFamily="34" charset="0"/>
           </a:endParaRPr>
@@ -2283,7 +2295,7 @@
             <a:buNone/>
           </a:pPr>
           <a:r>
-            <a:rPr lang="en-US" sz="1600" dirty="0">
+            <a:rPr lang="en-US" sz="1400" dirty="0">
               <a:latin typeface="Arial" panose="020B0604020202020204" pitchFamily="34" charset="0"/>
               <a:cs typeface="Arial" panose="020B0604020202020204" pitchFamily="34" charset="0"/>
             </a:rPr>
@@ -2295,12 +2307,23 @@
             <a:buNone/>
           </a:pPr>
           <a:r>
-            <a:rPr lang="en-US" sz="1600" dirty="0">
+            <a:rPr lang="en-US" sz="1400" dirty="0">
               <a:latin typeface="Arial" panose="020B0604020202020204" pitchFamily="34" charset="0"/>
               <a:cs typeface="Arial" panose="020B0604020202020204" pitchFamily="34" charset="0"/>
             </a:rPr>
-            <a:t>Year 1 FCF</a:t>
+            <a:t>Year 1 (Net Operating Cash Flow)</a:t>
           </a:r>
+          <a:r>
+            <a:rPr lang="en-US" sz="1400" baseline="30000" dirty="0">
+              <a:latin typeface="Arial" panose="020B0604020202020204" pitchFamily="34" charset="0"/>
+              <a:cs typeface="Arial" panose="020B0604020202020204" pitchFamily="34" charset="0"/>
+            </a:rPr>
+            <a:t>(2)</a:t>
+          </a:r>
+          <a:endParaRPr lang="en-US" sz="1400" dirty="0">
+            <a:latin typeface="Arial" panose="020B0604020202020204" pitchFamily="34" charset="0"/>
+            <a:cs typeface="Arial" panose="020B0604020202020204" pitchFamily="34" charset="0"/>
+          </a:endParaRPr>
         </a:p>
       </dgm:t>
     </dgm:pt>
@@ -2311,7 +2334,7 @@
         <a:bodyPr/>
         <a:lstStyle/>
         <a:p>
-          <a:endParaRPr lang="en-US" sz="1600">
+          <a:endParaRPr lang="en-US" sz="1400">
             <a:latin typeface="Arial" panose="020B0604020202020204" pitchFamily="34" charset="0"/>
             <a:cs typeface="Arial" panose="020B0604020202020204" pitchFamily="34" charset="0"/>
           </a:endParaRPr>
@@ -2325,7 +2348,7 @@
         <a:bodyPr/>
         <a:lstStyle/>
         <a:p>
-          <a:endParaRPr lang="en-US" sz="1600">
+          <a:endParaRPr lang="en-US" sz="1400">
             <a:latin typeface="Arial" panose="020B0604020202020204" pitchFamily="34" charset="0"/>
             <a:cs typeface="Arial" panose="020B0604020202020204" pitchFamily="34" charset="0"/>
           </a:endParaRPr>
@@ -2343,20 +2366,20 @@
             <a:buNone/>
           </a:pPr>
           <a:r>
-            <a:rPr lang="en-US" sz="1600" dirty="0">
+            <a:rPr lang="en-US" sz="1400" dirty="0">
               <a:latin typeface="Arial" panose="020B0604020202020204" pitchFamily="34" charset="0"/>
               <a:cs typeface="Arial" panose="020B0604020202020204" pitchFamily="34" charset="0"/>
             </a:rPr>
             <a:t>PV-10 $3.15Bn</a:t>
           </a:r>
           <a:r>
-            <a:rPr lang="en-US" sz="1600" baseline="30000" dirty="0">
+            <a:rPr lang="en-US" sz="1400" baseline="30000" dirty="0">
               <a:latin typeface="Arial" panose="020B0604020202020204" pitchFamily="34" charset="0"/>
               <a:cs typeface="Arial" panose="020B0604020202020204" pitchFamily="34" charset="0"/>
             </a:rPr>
             <a:t>(2)</a:t>
           </a:r>
-          <a:endParaRPr lang="en-US" sz="1600" dirty="0">
+          <a:endParaRPr lang="en-US" sz="1400" dirty="0">
             <a:latin typeface="Arial" panose="020B0604020202020204" pitchFamily="34" charset="0"/>
             <a:cs typeface="Arial" panose="020B0604020202020204" pitchFamily="34" charset="0"/>
           </a:endParaRPr>
@@ -2370,7 +2393,7 @@
         <a:bodyPr/>
         <a:lstStyle/>
         <a:p>
-          <a:endParaRPr lang="en-US" sz="1600">
+          <a:endParaRPr lang="en-US" sz="1400">
             <a:latin typeface="Arial" panose="020B0604020202020204" pitchFamily="34" charset="0"/>
             <a:cs typeface="Arial" panose="020B0604020202020204" pitchFamily="34" charset="0"/>
           </a:endParaRPr>
@@ -2384,7 +2407,7 @@
         <a:bodyPr/>
         <a:lstStyle/>
         <a:p>
-          <a:endParaRPr lang="en-US" sz="1600">
+          <a:endParaRPr lang="en-US" sz="1400">
             <a:latin typeface="Arial" panose="020B0604020202020204" pitchFamily="34" charset="0"/>
             <a:cs typeface="Arial" panose="020B0604020202020204" pitchFamily="34" charset="0"/>
           </a:endParaRPr>
@@ -3043,8 +3066,8 @@
       </dsp:nvSpPr>
       <dsp:spPr>
         <a:xfrm>
-          <a:off x="2670" y="253948"/>
-          <a:ext cx="2376681" cy="950672"/>
+          <a:off x="2720" y="245058"/>
+          <a:ext cx="2421129" cy="968451"/>
         </a:xfrm>
         <a:prstGeom prst="chevron">
           <a:avLst/>
@@ -3086,12 +3109,12 @@
         </a:fontRef>
       </dsp:style>
       <dsp:txBody>
-        <a:bodyPr spcFirstLastPara="0" vert="horz" wrap="square" lIns="64008" tIns="21336" rIns="21336" bIns="21336" numCol="1" spcCol="1270" anchor="ctr" anchorCtr="0">
+        <a:bodyPr spcFirstLastPara="0" vert="horz" wrap="square" lIns="56007" tIns="18669" rIns="18669" bIns="18669" numCol="1" spcCol="1270" anchor="ctr" anchorCtr="0">
           <a:noAutofit/>
         </a:bodyPr>
         <a:lstStyle/>
         <a:p>
-          <a:pPr marL="0" lvl="0" indent="0" algn="ctr" defTabSz="711200">
+          <a:pPr marL="0" lvl="0" indent="0" algn="ctr" defTabSz="622300">
             <a:lnSpc>
               <a:spcPct val="90000"/>
             </a:lnSpc>
@@ -3104,7 +3127,7 @@
             <a:buNone/>
           </a:pPr>
           <a:r>
-            <a:rPr lang="en-US" sz="1600" kern="1200" dirty="0">
+            <a:rPr lang="en-US" sz="1400" kern="1200" dirty="0">
               <a:latin typeface="Arial" panose="020B0604020202020204" pitchFamily="34" charset="0"/>
               <a:cs typeface="Arial" panose="020B0604020202020204" pitchFamily="34" charset="0"/>
             </a:rPr>
@@ -3113,8 +3136,8 @@
         </a:p>
       </dsp:txBody>
       <dsp:txXfrm>
-        <a:off x="478006" y="253948"/>
-        <a:ext cx="1426009" cy="950672"/>
+        <a:off x="486946" y="245058"/>
+        <a:ext cx="1452678" cy="968451"/>
       </dsp:txXfrm>
     </dsp:sp>
     <dsp:sp modelId="{8E5EB7D7-39EC-8D45-9521-D92AFF41FA86}">
@@ -3124,8 +3147,8 @@
       </dsp:nvSpPr>
       <dsp:spPr>
         <a:xfrm>
-          <a:off x="2141683" y="253948"/>
-          <a:ext cx="2376681" cy="950672"/>
+          <a:off x="2181736" y="245058"/>
+          <a:ext cx="2421129" cy="968451"/>
         </a:xfrm>
         <a:prstGeom prst="chevron">
           <a:avLst/>
@@ -3167,12 +3190,12 @@
         </a:fontRef>
       </dsp:style>
       <dsp:txBody>
-        <a:bodyPr spcFirstLastPara="0" vert="horz" wrap="square" lIns="64008" tIns="21336" rIns="21336" bIns="21336" numCol="1" spcCol="1270" anchor="ctr" anchorCtr="0">
+        <a:bodyPr spcFirstLastPara="0" vert="horz" wrap="square" lIns="56007" tIns="18669" rIns="18669" bIns="18669" numCol="1" spcCol="1270" anchor="ctr" anchorCtr="0">
           <a:noAutofit/>
         </a:bodyPr>
         <a:lstStyle/>
         <a:p>
-          <a:pPr marL="0" lvl="0" indent="0" algn="ctr" defTabSz="711200">
+          <a:pPr marL="0" lvl="0" indent="0" algn="ctr" defTabSz="622300">
             <a:lnSpc>
               <a:spcPct val="90000"/>
             </a:lnSpc>
@@ -3185,21 +3208,21 @@
             <a:buNone/>
           </a:pPr>
           <a:r>
-            <a:rPr lang="en-US" sz="1600" kern="1200" dirty="0">
+            <a:rPr lang="en-US" sz="1400" kern="1200" dirty="0">
               <a:latin typeface="Arial" panose="020B0604020202020204" pitchFamily="34" charset="0"/>
               <a:cs typeface="Arial" panose="020B0604020202020204" pitchFamily="34" charset="0"/>
             </a:rPr>
             <a:t>Revenue $40.37/BOE</a:t>
           </a:r>
           <a:r>
-            <a:rPr lang="en-US" sz="1600" kern="1200" baseline="30000" dirty="0">
+            <a:rPr lang="en-US" sz="1400" kern="1200" baseline="30000" dirty="0">
               <a:latin typeface="Arial" panose="020B0604020202020204" pitchFamily="34" charset="0"/>
               <a:cs typeface="Arial" panose="020B0604020202020204" pitchFamily="34" charset="0"/>
             </a:rPr>
             <a:t>(2)</a:t>
           </a:r>
           <a:r>
-            <a:rPr lang="en-US" sz="1600" kern="1200" dirty="0">
+            <a:rPr lang="en-US" sz="1400" kern="1200" dirty="0">
               <a:latin typeface="Arial" panose="020B0604020202020204" pitchFamily="34" charset="0"/>
               <a:cs typeface="Arial" panose="020B0604020202020204" pitchFamily="34" charset="0"/>
             </a:rPr>
@@ -3208,8 +3231,8 @@
         </a:p>
       </dsp:txBody>
       <dsp:txXfrm>
-        <a:off x="2617019" y="253948"/>
-        <a:ext cx="1426009" cy="950672"/>
+        <a:off x="2665962" y="245058"/>
+        <a:ext cx="1452678" cy="968451"/>
       </dsp:txXfrm>
     </dsp:sp>
     <dsp:sp modelId="{AB571E2C-C84F-6148-BFA7-8DC89D88C050}">
@@ -3219,8 +3242,8 @@
       </dsp:nvSpPr>
       <dsp:spPr>
         <a:xfrm>
-          <a:off x="4280697" y="253948"/>
-          <a:ext cx="2376681" cy="950672"/>
+          <a:off x="4360753" y="245058"/>
+          <a:ext cx="2421129" cy="968451"/>
         </a:xfrm>
         <a:prstGeom prst="chevron">
           <a:avLst/>
@@ -3262,12 +3285,12 @@
         </a:fontRef>
       </dsp:style>
       <dsp:txBody>
-        <a:bodyPr spcFirstLastPara="0" vert="horz" wrap="square" lIns="64008" tIns="21336" rIns="21336" bIns="21336" numCol="1" spcCol="1270" anchor="ctr" anchorCtr="0">
+        <a:bodyPr spcFirstLastPara="0" vert="horz" wrap="square" lIns="56007" tIns="18669" rIns="18669" bIns="18669" numCol="1" spcCol="1270" anchor="ctr" anchorCtr="0">
           <a:noAutofit/>
         </a:bodyPr>
         <a:lstStyle/>
         <a:p>
-          <a:pPr marL="0" lvl="0" indent="0" algn="ctr" defTabSz="711200">
+          <a:pPr marL="0" lvl="0" indent="0" algn="ctr" defTabSz="622300">
             <a:lnSpc>
               <a:spcPct val="90000"/>
             </a:lnSpc>
@@ -3280,17 +3303,28 @@
             <a:buNone/>
           </a:pPr>
           <a:r>
-            <a:rPr lang="en-US" sz="1600" kern="1200" dirty="0">
+            <a:rPr lang="en-US" sz="1400" kern="1200" dirty="0">
               <a:latin typeface="Arial" panose="020B0604020202020204" pitchFamily="34" charset="0"/>
               <a:cs typeface="Arial" panose="020B0604020202020204" pitchFamily="34" charset="0"/>
             </a:rPr>
             <a:t>EBITDA $25.78/BOE</a:t>
           </a:r>
+          <a:r>
+            <a:rPr lang="en-US" sz="1400" kern="1200" baseline="30000" dirty="0">
+              <a:latin typeface="Arial" panose="020B0604020202020204" pitchFamily="34" charset="0"/>
+              <a:cs typeface="Arial" panose="020B0604020202020204" pitchFamily="34" charset="0"/>
+            </a:rPr>
+            <a:t>(2)</a:t>
+          </a:r>
+          <a:endParaRPr lang="en-US" sz="1400" kern="1200" dirty="0">
+            <a:latin typeface="Arial" panose="020B0604020202020204" pitchFamily="34" charset="0"/>
+            <a:cs typeface="Arial" panose="020B0604020202020204" pitchFamily="34" charset="0"/>
+          </a:endParaRPr>
         </a:p>
       </dsp:txBody>
       <dsp:txXfrm>
-        <a:off x="4756033" y="253948"/>
-        <a:ext cx="1426009" cy="950672"/>
+        <a:off x="4844979" y="245058"/>
+        <a:ext cx="1452678" cy="968451"/>
       </dsp:txXfrm>
     </dsp:sp>
     <dsp:sp modelId="{034C30B2-668F-C541-9972-BF791A5406D0}">
@@ -3300,8 +3334,8 @@
       </dsp:nvSpPr>
       <dsp:spPr>
         <a:xfrm>
-          <a:off x="6419710" y="253948"/>
-          <a:ext cx="2376681" cy="950672"/>
+          <a:off x="6539769" y="245058"/>
+          <a:ext cx="2421129" cy="968451"/>
         </a:xfrm>
         <a:prstGeom prst="chevron">
           <a:avLst/>
@@ -3343,12 +3377,12 @@
         </a:fontRef>
       </dsp:style>
       <dsp:txBody>
-        <a:bodyPr spcFirstLastPara="0" vert="horz" wrap="square" lIns="64008" tIns="21336" rIns="21336" bIns="21336" numCol="1" spcCol="1270" anchor="ctr" anchorCtr="0">
+        <a:bodyPr spcFirstLastPara="0" vert="horz" wrap="square" lIns="56007" tIns="18669" rIns="18669" bIns="18669" numCol="1" spcCol="1270" anchor="ctr" anchorCtr="0">
           <a:noAutofit/>
         </a:bodyPr>
         <a:lstStyle/>
         <a:p>
-          <a:pPr marL="0" lvl="0" indent="0" algn="ctr" defTabSz="711200">
+          <a:pPr marL="0" lvl="0" indent="0" algn="ctr" defTabSz="622300">
             <a:lnSpc>
               <a:spcPct val="90000"/>
             </a:lnSpc>
@@ -3361,7 +3395,7 @@
             <a:buNone/>
           </a:pPr>
           <a:r>
-            <a:rPr lang="en-US" sz="1600" kern="1200" dirty="0">
+            <a:rPr lang="en-US" sz="1400" kern="1200" dirty="0">
               <a:latin typeface="Arial" panose="020B0604020202020204" pitchFamily="34" charset="0"/>
               <a:cs typeface="Arial" panose="020B0604020202020204" pitchFamily="34" charset="0"/>
             </a:rPr>
@@ -3369,7 +3403,7 @@
           </a:r>
         </a:p>
         <a:p>
-          <a:pPr marL="0" lvl="0" indent="0" algn="ctr" defTabSz="711200">
+          <a:pPr marL="0" lvl="0" indent="0" algn="ctr" defTabSz="622300">
             <a:lnSpc>
               <a:spcPct val="90000"/>
             </a:lnSpc>
@@ -3382,17 +3416,28 @@
             <a:buNone/>
           </a:pPr>
           <a:r>
-            <a:rPr lang="en-US" sz="1600" kern="1200" dirty="0">
+            <a:rPr lang="en-US" sz="1400" kern="1200" dirty="0">
               <a:latin typeface="Arial" panose="020B0604020202020204" pitchFamily="34" charset="0"/>
               <a:cs typeface="Arial" panose="020B0604020202020204" pitchFamily="34" charset="0"/>
             </a:rPr>
-            <a:t>Year 1 FCF</a:t>
+            <a:t>Year 1 (Net Operating Cash Flow)</a:t>
           </a:r>
+          <a:r>
+            <a:rPr lang="en-US" sz="1400" kern="1200" baseline="30000" dirty="0">
+              <a:latin typeface="Arial" panose="020B0604020202020204" pitchFamily="34" charset="0"/>
+              <a:cs typeface="Arial" panose="020B0604020202020204" pitchFamily="34" charset="0"/>
+            </a:rPr>
+            <a:t>(2)</a:t>
+          </a:r>
+          <a:endParaRPr lang="en-US" sz="1400" kern="1200" dirty="0">
+            <a:latin typeface="Arial" panose="020B0604020202020204" pitchFamily="34" charset="0"/>
+            <a:cs typeface="Arial" panose="020B0604020202020204" pitchFamily="34" charset="0"/>
+          </a:endParaRPr>
         </a:p>
       </dsp:txBody>
       <dsp:txXfrm>
-        <a:off x="6895046" y="253948"/>
-        <a:ext cx="1426009" cy="950672"/>
+        <a:off x="7023995" y="245058"/>
+        <a:ext cx="1452678" cy="968451"/>
       </dsp:txXfrm>
     </dsp:sp>
     <dsp:sp modelId="{5E7C07D8-7209-8342-84A4-49398B24878E}">
@@ -3402,8 +3447,8 @@
       </dsp:nvSpPr>
       <dsp:spPr>
         <a:xfrm>
-          <a:off x="8558724" y="253948"/>
-          <a:ext cx="2376681" cy="950672"/>
+          <a:off x="8718786" y="245058"/>
+          <a:ext cx="2421129" cy="968451"/>
         </a:xfrm>
         <a:prstGeom prst="chevron">
           <a:avLst/>
@@ -3445,12 +3490,12 @@
         </a:fontRef>
       </dsp:style>
       <dsp:txBody>
-        <a:bodyPr spcFirstLastPara="0" vert="horz" wrap="square" lIns="64008" tIns="21336" rIns="21336" bIns="21336" numCol="1" spcCol="1270" anchor="ctr" anchorCtr="0">
+        <a:bodyPr spcFirstLastPara="0" vert="horz" wrap="square" lIns="56007" tIns="18669" rIns="18669" bIns="18669" numCol="1" spcCol="1270" anchor="ctr" anchorCtr="0">
           <a:noAutofit/>
         </a:bodyPr>
         <a:lstStyle/>
         <a:p>
-          <a:pPr marL="0" lvl="0" indent="0" algn="ctr" defTabSz="711200">
+          <a:pPr marL="0" lvl="0" indent="0" algn="ctr" defTabSz="622300">
             <a:lnSpc>
               <a:spcPct val="90000"/>
             </a:lnSpc>
@@ -3463,28 +3508,28 @@
             <a:buNone/>
           </a:pPr>
           <a:r>
-            <a:rPr lang="en-US" sz="1600" kern="1200" dirty="0">
+            <a:rPr lang="en-US" sz="1400" kern="1200" dirty="0">
               <a:latin typeface="Arial" panose="020B0604020202020204" pitchFamily="34" charset="0"/>
               <a:cs typeface="Arial" panose="020B0604020202020204" pitchFamily="34" charset="0"/>
             </a:rPr>
             <a:t>PV-10 $3.15Bn</a:t>
           </a:r>
           <a:r>
-            <a:rPr lang="en-US" sz="1600" kern="1200" baseline="30000" dirty="0">
+            <a:rPr lang="en-US" sz="1400" kern="1200" baseline="30000" dirty="0">
               <a:latin typeface="Arial" panose="020B0604020202020204" pitchFamily="34" charset="0"/>
               <a:cs typeface="Arial" panose="020B0604020202020204" pitchFamily="34" charset="0"/>
             </a:rPr>
             <a:t>(2)</a:t>
           </a:r>
-          <a:endParaRPr lang="en-US" sz="1600" kern="1200" dirty="0">
+          <a:endParaRPr lang="en-US" sz="1400" kern="1200" dirty="0">
             <a:latin typeface="Arial" panose="020B0604020202020204" pitchFamily="34" charset="0"/>
             <a:cs typeface="Arial" panose="020B0604020202020204" pitchFamily="34" charset="0"/>
           </a:endParaRPr>
         </a:p>
       </dsp:txBody>
       <dsp:txXfrm>
-        <a:off x="9034060" y="253948"/>
-        <a:ext cx="1426009" cy="950672"/>
+        <a:off x="9203012" y="245058"/>
+        <a:ext cx="1452678" cy="968451"/>
       </dsp:txXfrm>
     </dsp:sp>
   </dsp:spTree>
@@ -6191,7 +6236,7 @@
           <a:p>
             <a:fld id="{EAF676CB-1D46-3B42-8B05-BCBADD1BDC68}" type="datetimeFigureOut">
               <a:rPr lang="en-US" smtClean="0"/>
-              <a:t>7/17/26</a:t>
+              <a:t>7/20/26</a:t>
             </a:fld>
             <a:endParaRPr lang="en-US"/>
           </a:p>
@@ -6605,7 +6650,7 @@
           <a:p>
             <a:fld id="{6CC06C82-133A-E74A-8F7A-AF8B764C1ED8}" type="datetimeFigureOut">
               <a:rPr lang="en-US" smtClean="0"/>
-              <a:t>7/17/26</a:t>
+              <a:t>7/20/26</a:t>
             </a:fld>
             <a:endParaRPr lang="en-US"/>
           </a:p>
@@ -6803,7 +6848,7 @@
           <a:p>
             <a:fld id="{6CC06C82-133A-E74A-8F7A-AF8B764C1ED8}" type="datetimeFigureOut">
               <a:rPr lang="en-US" smtClean="0"/>
-              <a:t>7/17/26</a:t>
+              <a:t>7/20/26</a:t>
             </a:fld>
             <a:endParaRPr lang="en-US"/>
           </a:p>
@@ -7011,7 +7056,7 @@
           <a:p>
             <a:fld id="{6CC06C82-133A-E74A-8F7A-AF8B764C1ED8}" type="datetimeFigureOut">
               <a:rPr lang="en-US" smtClean="0"/>
-              <a:t>7/17/26</a:t>
+              <a:t>7/20/26</a:t>
             </a:fld>
             <a:endParaRPr lang="en-US"/>
           </a:p>
@@ -7209,7 +7254,7 @@
           <a:p>
             <a:fld id="{6CC06C82-133A-E74A-8F7A-AF8B764C1ED8}" type="datetimeFigureOut">
               <a:rPr lang="en-US" smtClean="0"/>
-              <a:t>7/17/26</a:t>
+              <a:t>7/20/26</a:t>
             </a:fld>
             <a:endParaRPr lang="en-US"/>
           </a:p>
@@ -7484,7 +7529,7 @@
           <a:p>
             <a:fld id="{6CC06C82-133A-E74A-8F7A-AF8B764C1ED8}" type="datetimeFigureOut">
               <a:rPr lang="en-US" smtClean="0"/>
-              <a:t>7/17/26</a:t>
+              <a:t>7/20/26</a:t>
             </a:fld>
             <a:endParaRPr lang="en-US"/>
           </a:p>
@@ -7749,7 +7794,7 @@
           <a:p>
             <a:fld id="{6CC06C82-133A-E74A-8F7A-AF8B764C1ED8}" type="datetimeFigureOut">
               <a:rPr lang="en-US" smtClean="0"/>
-              <a:t>7/17/26</a:t>
+              <a:t>7/20/26</a:t>
             </a:fld>
             <a:endParaRPr lang="en-US"/>
           </a:p>
@@ -8161,7 +8206,7 @@
           <a:p>
             <a:fld id="{6CC06C82-133A-E74A-8F7A-AF8B764C1ED8}" type="datetimeFigureOut">
               <a:rPr lang="en-US" smtClean="0"/>
-              <a:t>7/17/26</a:t>
+              <a:t>7/20/26</a:t>
             </a:fld>
             <a:endParaRPr lang="en-US"/>
           </a:p>
@@ -8302,7 +8347,7 @@
           <a:p>
             <a:fld id="{6CC06C82-133A-E74A-8F7A-AF8B764C1ED8}" type="datetimeFigureOut">
               <a:rPr lang="en-US" smtClean="0"/>
-              <a:t>7/17/26</a:t>
+              <a:t>7/20/26</a:t>
             </a:fld>
             <a:endParaRPr lang="en-US"/>
           </a:p>
@@ -8415,7 +8460,7 @@
           <a:p>
             <a:fld id="{6CC06C82-133A-E74A-8F7A-AF8B764C1ED8}" type="datetimeFigureOut">
               <a:rPr lang="en-US" smtClean="0"/>
-              <a:t>7/17/26</a:t>
+              <a:t>7/20/26</a:t>
             </a:fld>
             <a:endParaRPr lang="en-US"/>
           </a:p>
@@ -8726,7 +8771,7 @@
           <a:p>
             <a:fld id="{6CC06C82-133A-E74A-8F7A-AF8B764C1ED8}" type="datetimeFigureOut">
               <a:rPr lang="en-US" smtClean="0"/>
-              <a:t>7/17/26</a:t>
+              <a:t>7/20/26</a:t>
             </a:fld>
             <a:endParaRPr lang="en-US"/>
           </a:p>
@@ -9014,7 +9059,7 @@
           <a:p>
             <a:fld id="{6CC06C82-133A-E74A-8F7A-AF8B764C1ED8}" type="datetimeFigureOut">
               <a:rPr lang="en-US" smtClean="0"/>
-              <a:t>7/17/26</a:t>
+              <a:t>7/20/26</a:t>
             </a:fld>
             <a:endParaRPr lang="en-US"/>
           </a:p>
@@ -9255,7 +9300,7 @@
           <a:p>
             <a:fld id="{6CC06C82-133A-E74A-8F7A-AF8B764C1ED8}" type="datetimeFigureOut">
               <a:rPr lang="en-US" smtClean="0"/>
-              <a:t>7/17/26</a:t>
+              <a:t>7/20/26</a:t>
             </a:fld>
             <a:endParaRPr lang="en-US"/>
           </a:p>
@@ -9816,10 +9861,10 @@
         </p:nvGrpSpPr>
         <p:grpSpPr>
           <a:xfrm>
-            <a:off x="1884261" y="4264234"/>
-            <a:ext cx="8423477" cy="774017"/>
-            <a:chOff x="2207870" y="4261946"/>
-            <a:chExt cx="8423477" cy="774017"/>
+            <a:off x="1884261" y="4264151"/>
+            <a:ext cx="8423477" cy="1017271"/>
+            <a:chOff x="2207870" y="4261863"/>
+            <a:chExt cx="8423477" cy="1017271"/>
           </a:xfrm>
         </p:grpSpPr>
         <p:sp>
@@ -9837,7 +9882,7 @@
           <p:spPr>
             <a:xfrm>
               <a:off x="2207870" y="4263471"/>
-              <a:ext cx="2967943" cy="769441"/>
+              <a:ext cx="2967943" cy="1015663"/>
             </a:xfrm>
             <a:prstGeom prst="rect">
               <a:avLst/>
@@ -9876,7 +9921,7 @@
                   <a:latin typeface="Arial" panose="020B0604020202020204" pitchFamily="34" charset="0"/>
                   <a:cs typeface="Arial" panose="020B0604020202020204" pitchFamily="34" charset="0"/>
                 </a:rPr>
-                <a:t>Independent PV-10 </a:t>
+                <a:t>Independent PV-10 asset value (inc. G&amp;A) </a:t>
               </a:r>
             </a:p>
           </p:txBody>
@@ -9895,7 +9940,7 @@
           </p:nvSpPr>
           <p:spPr>
             <a:xfrm>
-              <a:off x="4528594" y="4266522"/>
+              <a:off x="4852203" y="4261863"/>
               <a:ext cx="3134811" cy="769441"/>
             </a:xfrm>
             <a:prstGeom prst="rect">
@@ -9918,7 +9963,7 @@
                   <a:latin typeface="Arial" panose="020B0604020202020204" pitchFamily="34" charset="0"/>
                   <a:cs typeface="Arial" panose="020B0604020202020204" pitchFamily="34" charset="0"/>
                 </a:rPr>
-                <a:t>~1%</a:t>
+                <a:t>~$3.75Bn</a:t>
               </a:r>
             </a:p>
             <a:p>
@@ -9928,7 +9973,7 @@
                   <a:latin typeface="Arial" panose="020B0604020202020204" pitchFamily="34" charset="0"/>
                   <a:cs typeface="Arial" panose="020B0604020202020204" pitchFamily="34" charset="0"/>
                 </a:rPr>
-                <a:t>Variance to price paid</a:t>
+                <a:t>SEC PV-10 (ex. G&amp;A)</a:t>
               </a:r>
             </a:p>
           </p:txBody>
@@ -9970,7 +10015,7 @@
                   <a:latin typeface="Arial" panose="020B0604020202020204" pitchFamily="34" charset="0"/>
                   <a:cs typeface="Arial" panose="020B0604020202020204" pitchFamily="34" charset="0"/>
                 </a:rPr>
-                <a:t>0.1%</a:t>
+                <a:t>~$58-60/Bbl.</a:t>
               </a:r>
               <a:r>
                 <a:rPr lang="en-US" sz="2800" dirty="0">
@@ -9987,7 +10032,7 @@
                   <a:latin typeface="Arial" panose="020B0604020202020204" pitchFamily="34" charset="0"/>
                   <a:cs typeface="Arial" panose="020B0604020202020204" pitchFamily="34" charset="0"/>
                 </a:rPr>
-                <a:t>EBITDA vs street consensus</a:t>
+                <a:t>WTI Breakeven</a:t>
               </a:r>
             </a:p>
           </p:txBody>
@@ -11567,7 +11612,7 @@
         <p:spPr>
           <a:xfrm>
             <a:off x="467811" y="5459737"/>
-            <a:ext cx="10917080" cy="646331"/>
+            <a:ext cx="10917080" cy="872034"/>
           </a:xfrm>
           <a:prstGeom prst="rect">
             <a:avLst/>
@@ -11580,7 +11625,11 @@
           </a:bodyPr>
           <a:lstStyle/>
           <a:p>
-            <a:pPr algn="just"/>
+            <a:pPr algn="just">
+              <a:lnSpc>
+                <a:spcPct val="150000"/>
+              </a:lnSpc>
+            </a:pPr>
             <a:r>
               <a:rPr lang="en-US" b="1" dirty="0">
                 <a:latin typeface="Arial" panose="020B0604020202020204" pitchFamily="34" charset="0"/>
@@ -11744,7 +11793,7 @@
         <p:spPr>
           <a:xfrm>
             <a:off x="838199" y="5413257"/>
-            <a:ext cx="11027485" cy="646331"/>
+            <a:ext cx="11027485" cy="872034"/>
           </a:xfrm>
           <a:prstGeom prst="rect">
             <a:avLst/>
@@ -11757,7 +11806,11 @@
           </a:bodyPr>
           <a:lstStyle/>
           <a:p>
-            <a:pPr algn="just"/>
+            <a:pPr algn="just">
+              <a:lnSpc>
+                <a:spcPct val="150000"/>
+              </a:lnSpc>
+            </a:pPr>
             <a:r>
               <a:rPr lang="en-US" b="1" dirty="0">
                 <a:latin typeface="Arial" panose="020B0604020202020204" pitchFamily="34" charset="0"/>
@@ -11960,14 +12013,14 @@
             <p:ph idx="1"/>
             <p:extLst>
               <p:ext uri="{D42A27DB-BD31-4B8C-83A1-F6EECF244321}">
-                <p14:modId xmlns:p14="http://schemas.microsoft.com/office/powerpoint/2010/main" val="339984651"/>
+                <p14:modId xmlns:p14="http://schemas.microsoft.com/office/powerpoint/2010/main" val="1408488395"/>
               </p:ext>
             </p:extLst>
           </p:nvPr>
         </p:nvGraphicFramePr>
         <p:xfrm>
           <a:off x="464878" y="909008"/>
-          <a:ext cx="10938076" cy="1458569"/>
+          <a:ext cx="11142636" cy="1458569"/>
         </p:xfrm>
         <a:graphic>
           <a:graphicData uri="http://schemas.openxmlformats.org/drawingml/2006/diagram">
@@ -12010,41 +12063,6 @@
           </a:ln>
         </p:spPr>
       </p:pic>
-      <p:pic>
-        <p:nvPicPr>
-          <p:cNvPr id="8" name="Picture 7">
-            <a:extLst>
-              <a:ext uri="{FF2B5EF4-FFF2-40B4-BE49-F238E27FC236}">
-                <a16:creationId xmlns:a16="http://schemas.microsoft.com/office/drawing/2014/main" id="{3EEDFC62-ADE7-D60A-8716-A8CF17FB8AE6}"/>
-              </a:ext>
-            </a:extLst>
-          </p:cNvPr>
-          <p:cNvPicPr>
-            <a:picLocks noChangeAspect="1"/>
-          </p:cNvPicPr>
-          <p:nvPr/>
-        </p:nvPicPr>
-        <p:blipFill>
-          <a:blip r:embed="rId8"/>
-          <a:stretch>
-            <a:fillRect/>
-          </a:stretch>
-        </p:blipFill>
-        <p:spPr>
-          <a:xfrm>
-            <a:off x="6804790" y="2267870"/>
-            <a:ext cx="4598164" cy="3284402"/>
-          </a:xfrm>
-          <a:prstGeom prst="rect">
-            <a:avLst/>
-          </a:prstGeom>
-          <a:ln>
-            <a:solidFill>
-              <a:schemeClr val="tx1"/>
-            </a:solidFill>
-          </a:ln>
-        </p:spPr>
-      </p:pic>
       <p:sp>
         <p:nvSpPr>
           <p:cNvPr id="10" name="TextBox 9">
@@ -12059,8 +12077,8 @@
         </p:nvSpPr>
         <p:spPr>
           <a:xfrm>
-            <a:off x="464879" y="5700854"/>
-            <a:ext cx="10938076" cy="646331"/>
+            <a:off x="464877" y="5520232"/>
+            <a:ext cx="11142635" cy="1021883"/>
           </a:xfrm>
           <a:prstGeom prst="rect">
             <a:avLst/>
@@ -12073,27 +12091,45 @@
           </a:bodyPr>
           <a:lstStyle/>
           <a:p>
-            <a:pPr algn="just"/>
+            <a:pPr algn="just">
+              <a:lnSpc>
+                <a:spcPct val="150000"/>
+              </a:lnSpc>
+            </a:pPr>
             <a:r>
-              <a:rPr lang="en-US" b="1" dirty="0">
+              <a:rPr lang="en-US" sz="1400" b="1" dirty="0">
                 <a:latin typeface="Arial" panose="020B0604020202020204" pitchFamily="34" charset="0"/>
                 <a:cs typeface="Arial" panose="020B0604020202020204" pitchFamily="34" charset="0"/>
               </a:rPr>
-              <a:t>Independent PV-10 of $3.15Bn</a:t>
+              <a:t>PV-10 asset value of $3.15Bn</a:t>
             </a:r>
             <a:r>
-              <a:rPr lang="en-US" b="1" baseline="30000" dirty="0">
+              <a:rPr lang="en-US" sz="1400" b="1" baseline="30000" dirty="0">
+                <a:latin typeface="Arial" panose="020B0604020202020204" pitchFamily="34" charset="0"/>
+                <a:cs typeface="Arial" panose="020B0604020202020204" pitchFamily="34" charset="0"/>
+              </a:rPr>
+              <a:t>(2) </a:t>
+            </a:r>
+            <a:r>
+              <a:rPr lang="en-US" sz="1400" b="1" dirty="0">
+                <a:latin typeface="Arial" panose="020B0604020202020204" pitchFamily="34" charset="0"/>
+                <a:cs typeface="Arial" panose="020B0604020202020204" pitchFamily="34" charset="0"/>
+              </a:rPr>
+              <a:t>(inc. G&amp;A) lands within ~1% of the $3.1Bn paid. Stripping corporate G&amp;A (SEC PV-10 convention) raises asset value to $3.74Bn</a:t>
+            </a:r>
+            <a:r>
+              <a:rPr lang="en-US" sz="1400" b="1" baseline="30000" dirty="0">
                 <a:latin typeface="Arial" panose="020B0604020202020204" pitchFamily="34" charset="0"/>
                 <a:cs typeface="Arial" panose="020B0604020202020204" pitchFamily="34" charset="0"/>
               </a:rPr>
               <a:t>(2)</a:t>
             </a:r>
             <a:r>
-              <a:rPr lang="en-US" b="1" dirty="0">
+              <a:rPr lang="en-US" sz="1400" b="1" dirty="0">
                 <a:latin typeface="Arial" panose="020B0604020202020204" pitchFamily="34" charset="0"/>
                 <a:cs typeface="Arial" panose="020B0604020202020204" pitchFamily="34" charset="0"/>
               </a:rPr>
-              <a:t> lands within ~1% of the $3.1Bn Crescent paid, and reconciles to street EBITDA within 0.1%, indicating the assets were priced fairly.</a:t>
+              <a:t>; the ~$600MM difference approximates the capitalized cost of Vital's standalone overhead, which aligns with the corporate synergies Crescent expects to capture by removing duplicate G&amp;A.</a:t>
             </a:r>
           </a:p>
         </p:txBody>
@@ -12112,7 +12148,7 @@
         </p:nvSpPr>
         <p:spPr>
           <a:xfrm>
-            <a:off x="464878" y="6488668"/>
+            <a:off x="464878" y="6522535"/>
             <a:ext cx="6099586" cy="369332"/>
           </a:xfrm>
           <a:prstGeom prst="rect">
@@ -12147,7 +12183,7 @@
                 </a:solidFill>
                 <a:latin typeface="Arial" panose="020B0604020202020204" pitchFamily="34" charset="0"/>
                 <a:cs typeface="Arial" panose="020B0604020202020204" pitchFamily="34" charset="0"/>
-                <a:hlinkClick r:id="rId9">
+                <a:hlinkClick r:id="rId8">
                   <a:extLst>
                     <a:ext uri="{A12FA001-AC4F-418D-AE19-62706E023703}">
                       <ahyp:hlinkClr xmlns:ahyp="http://schemas.microsoft.com/office/drawing/2018/hyperlinkcolor" val="tx"/>
@@ -12183,6 +12219,41 @@
           </a:p>
         </p:txBody>
       </p:sp>
+      <p:pic>
+        <p:nvPicPr>
+          <p:cNvPr id="5" name="Picture 4">
+            <a:extLst>
+              <a:ext uri="{FF2B5EF4-FFF2-40B4-BE49-F238E27FC236}">
+                <a16:creationId xmlns:a16="http://schemas.microsoft.com/office/drawing/2014/main" id="{91AC9B98-6ECC-0CD6-4A84-C878B4862F8A}"/>
+              </a:ext>
+            </a:extLst>
+          </p:cNvPr>
+          <p:cNvPicPr>
+            <a:picLocks noChangeAspect="1"/>
+          </p:cNvPicPr>
+          <p:nvPr/>
+        </p:nvPicPr>
+        <p:blipFill>
+          <a:blip r:embed="rId9"/>
+          <a:stretch>
+            <a:fillRect/>
+          </a:stretch>
+        </p:blipFill>
+        <p:spPr>
+          <a:xfrm>
+            <a:off x="7123970" y="2323088"/>
+            <a:ext cx="4381265" cy="3129476"/>
+          </a:xfrm>
+          <a:prstGeom prst="rect">
+            <a:avLst/>
+          </a:prstGeom>
+          <a:ln>
+            <a:solidFill>
+              <a:schemeClr val="tx1"/>
+            </a:solidFill>
+          </a:ln>
+        </p:spPr>
+      </p:pic>
     </p:spTree>
     <p:extLst>
       <p:ext uri="{BB962C8B-B14F-4D97-AF65-F5344CB8AC3E}">
@@ -12273,13 +12344,13 @@
         </p:spPr>
         <p:txBody>
           <a:bodyPr>
-            <a:normAutofit fontScale="92500" lnSpcReduction="20000"/>
+            <a:normAutofit fontScale="85000" lnSpcReduction="20000"/>
           </a:bodyPr>
           <a:lstStyle/>
           <a:p>
             <a:pPr algn="just">
               <a:lnSpc>
-                <a:spcPct val="150000"/>
+                <a:spcPct val="170000"/>
               </a:lnSpc>
             </a:pPr>
             <a:r>
@@ -12295,13 +12366,13 @@
             </a:r>
             <a:r>
               <a:rPr lang="en-US" sz="1800" dirty="0"/>
-              <a:t> within ~1% of the ~$3.1Bn Crescent paid. The deal was priced fairly on the rocks.</a:t>
+              <a:t> (inc. G&amp;A) within ~1% of the ~$3.1Bn Crescent paid. The deal was priced fairly on the rocks.</a:t>
             </a:r>
           </a:p>
           <a:p>
             <a:pPr algn="just">
               <a:lnSpc>
-                <a:spcPct val="150000"/>
+                <a:spcPct val="170000"/>
               </a:lnSpc>
             </a:pPr>
             <a:r>
@@ -12315,7 +12386,7 @@
           <a:p>
             <a:pPr lvl="1" algn="just">
               <a:lnSpc>
-                <a:spcPct val="150000"/>
+                <a:spcPct val="170000"/>
               </a:lnSpc>
             </a:pPr>
             <a:r>
@@ -12340,7 +12411,7 @@
           <a:p>
             <a:pPr lvl="1" algn="just">
               <a:lnSpc>
-                <a:spcPct val="150000"/>
+                <a:spcPct val="170000"/>
               </a:lnSpc>
             </a:pPr>
             <a:r>
@@ -12365,7 +12436,7 @@
           <a:p>
             <a:pPr lvl="1" algn="just">
               <a:lnSpc>
-                <a:spcPct val="150000"/>
+                <a:spcPct val="170000"/>
               </a:lnSpc>
             </a:pPr>
             <a:r>
@@ -12390,7 +12461,7 @@
           <a:p>
             <a:pPr algn="just">
               <a:lnSpc>
-                <a:spcPct val="150000"/>
+                <a:spcPct val="170000"/>
               </a:lnSpc>
             </a:pPr>
             <a:r>
@@ -12404,7 +12475,7 @@
           <a:p>
             <a:pPr algn="just">
               <a:lnSpc>
-                <a:spcPct val="150000"/>
+                <a:spcPct val="170000"/>
               </a:lnSpc>
             </a:pPr>
             <a:r>
@@ -12632,6 +12703,167 @@
     <p:extLst>
       <p:ext uri="{BB962C8B-B14F-4D97-AF65-F5344CB8AC3E}">
         <p14:creationId xmlns:p14="http://schemas.microsoft.com/office/powerpoint/2010/main" val="977325193"/>
+      </p:ext>
+    </p:extLst>
+  </p:cSld>
+  <p:clrMapOvr>
+    <a:masterClrMapping/>
+  </p:clrMapOvr>
+</p:sld>
+</file>
+
+<file path=ppt/slides/slide6.xml><?xml version="1.0" encoding="utf-8"?>
+<p:sld xmlns:a="http://schemas.openxmlformats.org/drawingml/2006/main" xmlns:r="http://schemas.openxmlformats.org/officeDocument/2006/relationships" xmlns:p="http://schemas.openxmlformats.org/presentationml/2006/main">
+  <p:cSld>
+    <p:spTree>
+      <p:nvGrpSpPr>
+        <p:cNvPr id="1" name=""/>
+        <p:cNvGrpSpPr/>
+        <p:nvPr/>
+      </p:nvGrpSpPr>
+      <p:grpSpPr>
+        <a:xfrm>
+          <a:off x="0" y="0"/>
+          <a:ext cx="0" cy="0"/>
+          <a:chOff x="0" y="0"/>
+          <a:chExt cx="0" cy="0"/>
+        </a:xfrm>
+      </p:grpSpPr>
+      <p:sp>
+        <p:nvSpPr>
+          <p:cNvPr id="2" name="Title 1">
+            <a:extLst>
+              <a:ext uri="{FF2B5EF4-FFF2-40B4-BE49-F238E27FC236}">
+                <a16:creationId xmlns:a16="http://schemas.microsoft.com/office/drawing/2014/main" id="{831AC6DB-D4DD-108C-895E-D6CCC74DDD48}"/>
+              </a:ext>
+            </a:extLst>
+          </p:cNvPr>
+          <p:cNvSpPr>
+            <a:spLocks noGrp="1"/>
+          </p:cNvSpPr>
+          <p:nvPr>
+            <p:ph type="title"/>
+          </p:nvPr>
+        </p:nvSpPr>
+        <p:spPr>
+          <a:xfrm>
+            <a:off x="838200" y="0"/>
+            <a:ext cx="10515600" cy="1325563"/>
+          </a:xfrm>
+        </p:spPr>
+        <p:txBody>
+          <a:bodyPr>
+            <a:normAutofit/>
+          </a:bodyPr>
+          <a:lstStyle/>
+          <a:p>
+            <a:r>
+              <a:rPr lang="en-US" sz="3200" b="1" dirty="0">
+                <a:solidFill>
+                  <a:srgbClr val="002060"/>
+                </a:solidFill>
+                <a:latin typeface="Arial" panose="020B0604020202020204" pitchFamily="34" charset="0"/>
+                <a:cs typeface="Arial" panose="020B0604020202020204" pitchFamily="34" charset="0"/>
+              </a:rPr>
+              <a:t>Appendix</a:t>
+            </a:r>
+          </a:p>
+        </p:txBody>
+      </p:sp>
+      <p:pic>
+        <p:nvPicPr>
+          <p:cNvPr id="5" name="Picture 4">
+            <a:extLst>
+              <a:ext uri="{FF2B5EF4-FFF2-40B4-BE49-F238E27FC236}">
+                <a16:creationId xmlns:a16="http://schemas.microsoft.com/office/drawing/2014/main" id="{2AF434A5-EC0C-F57D-AB78-AE5B069D240F}"/>
+              </a:ext>
+            </a:extLst>
+          </p:cNvPr>
+          <p:cNvPicPr>
+            <a:picLocks noChangeAspect="1"/>
+          </p:cNvPicPr>
+          <p:nvPr/>
+        </p:nvPicPr>
+        <p:blipFill>
+          <a:blip r:embed="rId2"/>
+          <a:stretch>
+            <a:fillRect/>
+          </a:stretch>
+        </p:blipFill>
+        <p:spPr>
+          <a:xfrm>
+            <a:off x="838199" y="1119021"/>
+            <a:ext cx="5494867" cy="3924905"/>
+          </a:xfrm>
+          <a:prstGeom prst="rect">
+            <a:avLst/>
+          </a:prstGeom>
+          <a:ln>
+            <a:solidFill>
+              <a:schemeClr val="tx1"/>
+            </a:solidFill>
+          </a:ln>
+        </p:spPr>
+      </p:pic>
+      <p:sp>
+        <p:nvSpPr>
+          <p:cNvPr id="7" name="TextBox 6">
+            <a:extLst>
+              <a:ext uri="{FF2B5EF4-FFF2-40B4-BE49-F238E27FC236}">
+                <a16:creationId xmlns:a16="http://schemas.microsoft.com/office/drawing/2014/main" id="{6A4E610B-77B3-8C0C-1DB5-5165EC822368}"/>
+              </a:ext>
+            </a:extLst>
+          </p:cNvPr>
+          <p:cNvSpPr txBox="1"/>
+          <p:nvPr/>
+        </p:nvSpPr>
+        <p:spPr>
+          <a:xfrm>
+            <a:off x="838200" y="5100370"/>
+            <a:ext cx="10515599" cy="1564467"/>
+          </a:xfrm>
+          <a:prstGeom prst="rect">
+            <a:avLst/>
+          </a:prstGeom>
+          <a:noFill/>
+        </p:spPr>
+        <p:txBody>
+          <a:bodyPr wrap="square">
+            <a:spAutoFit/>
+          </a:bodyPr>
+          <a:lstStyle/>
+          <a:p>
+            <a:pPr algn="just"/>
+            <a:r>
+              <a:rPr lang="en-US" b="1" dirty="0">
+                <a:latin typeface="Arial" panose="020B0604020202020204" pitchFamily="34" charset="0"/>
+                <a:cs typeface="Arial" panose="020B0604020202020204" pitchFamily="34" charset="0"/>
+              </a:rPr>
+              <a:t>Takeaway:</a:t>
+            </a:r>
+          </a:p>
+          <a:p>
+            <a:pPr marL="285750" indent="-285750" algn="just">
+              <a:lnSpc>
+                <a:spcPct val="150000"/>
+              </a:lnSpc>
+              <a:buFont typeface="Arial" panose="020B0604020202020204" pitchFamily="34" charset="0"/>
+              <a:buChar char="•"/>
+            </a:pPr>
+            <a:r>
+              <a:rPr lang="en-US" dirty="0">
+                <a:latin typeface="Arial" panose="020B0604020202020204" pitchFamily="34" charset="0"/>
+                <a:cs typeface="Arial" panose="020B0604020202020204" pitchFamily="34" charset="0"/>
+              </a:rPr>
+              <a:t>Excluding corporate G&amp;A per standard SEC PV-10 rules yields a baseline asset value of $3.75Bn, revealing ~$600MM in latent asset worth above the $3.1Bn transaction price. On an unburdened basis, the underlying reserves maintain positive asset economics down to ~$50–52/bbl. WTI.</a:t>
+            </a:r>
+          </a:p>
+        </p:txBody>
+      </p:sp>
+    </p:spTree>
+    <p:extLst>
+      <p:ext uri="{BB962C8B-B14F-4D97-AF65-F5344CB8AC3E}">
+        <p14:creationId xmlns:p14="http://schemas.microsoft.com/office/powerpoint/2010/main" val="791177667"/>
       </p:ext>
     </p:extLst>
   </p:cSld>
